--- a/Python Calculator.pptx
+++ b/Python Calculator.pptx
@@ -109,6 +109,11 @@
       </a:defRPr>
     </a:lvl9pPr>
   </p:defaultTextStyle>
+  <p:extLst>
+    <p:ext uri="{EFAFB233-063F-42B5-8137-9DF3F51BA10A}">
+      <p15:sldGuideLst xmlns:p15="http://schemas.microsoft.com/office/powerpoint/2012/main"/>
+    </p:ext>
+  </p:extLst>
 </p:presentation>
 </file>
 
@@ -834,7 +839,7 @@
           <a:p>
             <a:fld id="{0AFD88C3-1DA2-4FF2-AA46-CA5FE0CD5AE6}" type="datetimeFigureOut">
               <a:rPr lang="en-IN" smtClean="0"/>
-              <a:t>12-02-2025</a:t>
+              <a:t>13-02-2025</a:t>
             </a:fld>
             <a:endParaRPr lang="en-IN"/>
           </a:p>
@@ -1085,7 +1090,7 @@
           <a:p>
             <a:fld id="{0AFD88C3-1DA2-4FF2-AA46-CA5FE0CD5AE6}" type="datetimeFigureOut">
               <a:rPr lang="en-IN" smtClean="0"/>
-              <a:t>12-02-2025</a:t>
+              <a:t>13-02-2025</a:t>
             </a:fld>
             <a:endParaRPr lang="en-IN"/>
           </a:p>
@@ -1399,7 +1404,7 @@
           <a:p>
             <a:fld id="{0AFD88C3-1DA2-4FF2-AA46-CA5FE0CD5AE6}" type="datetimeFigureOut">
               <a:rPr lang="en-IN" smtClean="0"/>
-              <a:t>12-02-2025</a:t>
+              <a:t>13-02-2025</a:t>
             </a:fld>
             <a:endParaRPr lang="en-IN"/>
           </a:p>
@@ -1740,7 +1745,7 @@
           <a:p>
             <a:fld id="{0AFD88C3-1DA2-4FF2-AA46-CA5FE0CD5AE6}" type="datetimeFigureOut">
               <a:rPr lang="en-IN" smtClean="0"/>
-              <a:t>12-02-2025</a:t>
+              <a:t>13-02-2025</a:t>
             </a:fld>
             <a:endParaRPr lang="en-IN"/>
           </a:p>
@@ -2054,7 +2059,7 @@
           <a:p>
             <a:fld id="{0AFD88C3-1DA2-4FF2-AA46-CA5FE0CD5AE6}" type="datetimeFigureOut">
               <a:rPr lang="en-IN" smtClean="0"/>
-              <a:t>12-02-2025</a:t>
+              <a:t>13-02-2025</a:t>
             </a:fld>
             <a:endParaRPr lang="en-IN"/>
           </a:p>
@@ -2447,7 +2452,7 @@
           <a:p>
             <a:fld id="{0AFD88C3-1DA2-4FF2-AA46-CA5FE0CD5AE6}" type="datetimeFigureOut">
               <a:rPr lang="en-IN" smtClean="0"/>
-              <a:t>12-02-2025</a:t>
+              <a:t>13-02-2025</a:t>
             </a:fld>
             <a:endParaRPr lang="en-IN"/>
           </a:p>
@@ -2617,7 +2622,7 @@
           <a:p>
             <a:fld id="{0AFD88C3-1DA2-4FF2-AA46-CA5FE0CD5AE6}" type="datetimeFigureOut">
               <a:rPr lang="en-IN" smtClean="0"/>
-              <a:t>12-02-2025</a:t>
+              <a:t>13-02-2025</a:t>
             </a:fld>
             <a:endParaRPr lang="en-IN"/>
           </a:p>
@@ -2797,7 +2802,7 @@
           <a:p>
             <a:fld id="{0AFD88C3-1DA2-4FF2-AA46-CA5FE0CD5AE6}" type="datetimeFigureOut">
               <a:rPr lang="en-IN" smtClean="0"/>
-              <a:t>12-02-2025</a:t>
+              <a:t>13-02-2025</a:t>
             </a:fld>
             <a:endParaRPr lang="en-IN"/>
           </a:p>
@@ -2973,7 +2978,7 @@
           <a:p>
             <a:fld id="{0AFD88C3-1DA2-4FF2-AA46-CA5FE0CD5AE6}" type="datetimeFigureOut">
               <a:rPr lang="en-IN" smtClean="0"/>
-              <a:t>12-02-2025</a:t>
+              <a:t>13-02-2025</a:t>
             </a:fld>
             <a:endParaRPr lang="en-IN"/>
           </a:p>
@@ -3220,7 +3225,7 @@
           <a:p>
             <a:fld id="{0AFD88C3-1DA2-4FF2-AA46-CA5FE0CD5AE6}" type="datetimeFigureOut">
               <a:rPr lang="en-IN" smtClean="0"/>
-              <a:t>12-02-2025</a:t>
+              <a:t>13-02-2025</a:t>
             </a:fld>
             <a:endParaRPr lang="en-IN"/>
           </a:p>
@@ -3452,7 +3457,7 @@
           <a:p>
             <a:fld id="{0AFD88C3-1DA2-4FF2-AA46-CA5FE0CD5AE6}" type="datetimeFigureOut">
               <a:rPr lang="en-IN" smtClean="0"/>
-              <a:t>12-02-2025</a:t>
+              <a:t>13-02-2025</a:t>
             </a:fld>
             <a:endParaRPr lang="en-IN"/>
           </a:p>
@@ -3826,7 +3831,7 @@
           <a:p>
             <a:fld id="{0AFD88C3-1DA2-4FF2-AA46-CA5FE0CD5AE6}" type="datetimeFigureOut">
               <a:rPr lang="en-IN" smtClean="0"/>
-              <a:t>12-02-2025</a:t>
+              <a:t>13-02-2025</a:t>
             </a:fld>
             <a:endParaRPr lang="en-IN"/>
           </a:p>
@@ -3949,7 +3954,7 @@
           <a:p>
             <a:fld id="{0AFD88C3-1DA2-4FF2-AA46-CA5FE0CD5AE6}" type="datetimeFigureOut">
               <a:rPr lang="en-IN" smtClean="0"/>
-              <a:t>12-02-2025</a:t>
+              <a:t>13-02-2025</a:t>
             </a:fld>
             <a:endParaRPr lang="en-IN"/>
           </a:p>
@@ -4044,7 +4049,7 @@
           <a:p>
             <a:fld id="{0AFD88C3-1DA2-4FF2-AA46-CA5FE0CD5AE6}" type="datetimeFigureOut">
               <a:rPr lang="en-IN" smtClean="0"/>
-              <a:t>12-02-2025</a:t>
+              <a:t>13-02-2025</a:t>
             </a:fld>
             <a:endParaRPr lang="en-IN"/>
           </a:p>
@@ -4299,7 +4304,7 @@
           <a:p>
             <a:fld id="{0AFD88C3-1DA2-4FF2-AA46-CA5FE0CD5AE6}" type="datetimeFigureOut">
               <a:rPr lang="en-IN" smtClean="0"/>
-              <a:t>12-02-2025</a:t>
+              <a:t>13-02-2025</a:t>
             </a:fld>
             <a:endParaRPr lang="en-IN"/>
           </a:p>
@@ -4562,7 +4567,7 @@
           <a:p>
             <a:fld id="{0AFD88C3-1DA2-4FF2-AA46-CA5FE0CD5AE6}" type="datetimeFigureOut">
               <a:rPr lang="en-IN" smtClean="0"/>
-              <a:t>12-02-2025</a:t>
+              <a:t>13-02-2025</a:t>
             </a:fld>
             <a:endParaRPr lang="en-IN"/>
           </a:p>
@@ -5305,7 +5310,7 @@
           <a:p>
             <a:fld id="{0AFD88C3-1DA2-4FF2-AA46-CA5FE0CD5AE6}" type="datetimeFigureOut">
               <a:rPr lang="en-IN" smtClean="0"/>
-              <a:t>12-02-2025</a:t>
+              <a:t>13-02-2025</a:t>
             </a:fld>
             <a:endParaRPr lang="en-IN"/>
           </a:p>
@@ -6092,14 +6097,7 @@
                 <a:latin typeface="Arial" panose="020B0604020202020204" pitchFamily="34" charset="0"/>
                 <a:cs typeface="Arial" panose="020B0604020202020204" pitchFamily="34" charset="0"/>
               </a:rPr>
-              <a:t>F</a:t>
-            </a:r>
-            <a:r>
-              <a:rPr lang="en-IN" b="1" dirty="0" smtClean="0">
-                <a:latin typeface="Arial" panose="020B0604020202020204" pitchFamily="34" charset="0"/>
-                <a:cs typeface="Arial" panose="020B0604020202020204" pitchFamily="34" charset="0"/>
-              </a:rPr>
-              <a:t>unctionality in Calculator</a:t>
+              <a:t>Functionality in Calculator</a:t>
             </a:r>
             <a:endParaRPr lang="en-IN" b="1" dirty="0">
               <a:latin typeface="Arial" panose="020B0604020202020204" pitchFamily="34" charset="0"/>
@@ -6230,11 +6228,11 @@
           <a:lstStyle/>
           <a:p>
             <a:r>
-              <a:rPr lang="en-IN" b="1" dirty="0" smtClean="0">
+              <a:rPr lang="en-US" b="1" dirty="0" smtClean="0">
                 <a:latin typeface="Arial" panose="020B0604020202020204" pitchFamily="34" charset="0"/>
                 <a:cs typeface="Arial" panose="020B0604020202020204" pitchFamily="34" charset="0"/>
               </a:rPr>
-              <a:t>Demo</a:t>
+              <a:t>Calculator</a:t>
             </a:r>
             <a:endParaRPr lang="en-IN" b="1" dirty="0">
               <a:latin typeface="Arial" panose="020B0604020202020204" pitchFamily="34" charset="0"/>
@@ -6243,25 +6241,35 @@
           </a:p>
         </p:txBody>
       </p:sp>
-      <p:sp>
-        <p:nvSpPr>
-          <p:cNvPr id="3" name="Content Placeholder 2"/>
-          <p:cNvSpPr>
-            <a:spLocks noGrp="1"/>
-          </p:cNvSpPr>
+      <p:pic>
+        <p:nvPicPr>
+          <p:cNvPr id="4" name="Content Placeholder 3"/>
+          <p:cNvPicPr>
+            <a:picLocks noGrp="1" noChangeAspect="1"/>
+          </p:cNvPicPr>
           <p:nvPr>
             <p:ph idx="1"/>
           </p:nvPr>
-        </p:nvSpPr>
-        <p:spPr/>
-        <p:txBody>
-          <a:bodyPr/>
-          <a:lstStyle/>
-          <a:p>
-            <a:endParaRPr lang="en-IN" dirty="0"/>
-          </a:p>
-        </p:txBody>
-      </p:sp>
+        </p:nvPicPr>
+        <p:blipFill>
+          <a:blip r:embed="rId2">
+            <a:extLst>
+              <a:ext uri="{28A0092B-C50C-407E-A947-70E740481C1C}">
+                <a14:useLocalDpi xmlns:a14="http://schemas.microsoft.com/office/drawing/2010/main" val="0"/>
+              </a:ext>
+            </a:extLst>
+          </a:blip>
+          <a:stretch>
+            <a:fillRect/>
+          </a:stretch>
+        </p:blipFill>
+        <p:spPr>
+          <a:xfrm>
+            <a:off x="2680494" y="2596356"/>
+            <a:ext cx="4591050" cy="3009900"/>
+          </a:xfrm>
+        </p:spPr>
+      </p:pic>
     </p:spTree>
     <p:extLst>
       <p:ext uri="{BB962C8B-B14F-4D97-AF65-F5344CB8AC3E}">
